--- a/gallery/renders/title_basic.pptx
+++ b/gallery/renders/title_basic.pptx
@@ -46,7 +46,9 @@
           <a:bodyPr wrap="square" lIns="0" rIns="0" tIns="0" bIns="0"/>
           <a:lstStyle/>
           <a:p>
-            <a:pPr algn="l"/>
+            <a:pPr algn="l">
+              <a:buNone/>
+            </a:pPr>
             <a:r>
               <a:rPr lang="en-US" sz="2800">
                 <a:latin typeface="Arial"/>
@@ -76,7 +78,9 @@
           <a:bodyPr wrap="square" lIns="0" rIns="0" tIns="0" bIns="0"/>
           <a:lstStyle/>
           <a:p>
-            <a:pPr algn="l"/>
+            <a:pPr algn="l">
+              <a:buNone/>
+            </a:pPr>
             <a:r>
               <a:rPr lang="en-US" sz="4400" b="1">
                 <a:latin typeface="Arial"/>

--- a/gallery/renders/title_basic.pptx
+++ b/gallery/renders/title_basic.pptx
@@ -35,7 +35,7 @@
         <p:spPr>
           <a:xfrm>
             <a:off x="910336" y="3716121"/>
-            <a:ext cx="11184128" cy="1331366"/>
+            <a:ext cx="11184128" cy="426719"/>
           </a:xfrm>
           <a:prstGeom prst="rect">
             <a:avLst/>
@@ -67,7 +67,7 @@
         <p:spPr>
           <a:xfrm>
             <a:off x="910336" y="1711756"/>
-            <a:ext cx="11184128" cy="1711756"/>
+            <a:ext cx="11184128" cy="670560"/>
           </a:xfrm>
           <a:prstGeom prst="rect">
             <a:avLst/>

--- a/gallery/renders/title_basic.pptx
+++ b/gallery/renders/title_basic.pptx
@@ -35,7 +35,7 @@
         <p:spPr>
           <a:xfrm>
             <a:off x="910336" y="3716121"/>
-            <a:ext cx="11184128" cy="426719"/>
+            <a:ext cx="11184128" cy="426720"/>
           </a:xfrm>
           <a:prstGeom prst="rect">
             <a:avLst/>
